--- a/docs/assets/images/Promo.pptx
+++ b/docs/assets/images/Promo.pptx
@@ -6181,6 +6181,36 @@
           <a:chExt cx="0" cy="0"/>
         </a:xfrm>
       </p:grpSpPr>
+      <p:pic>
+        <p:nvPicPr>
+          <p:cNvPr id="7" name="Picture 6">
+            <a:extLst>
+              <a:ext uri="{FF2B5EF4-FFF2-40B4-BE49-F238E27FC236}">
+                <a16:creationId xmlns:a16="http://schemas.microsoft.com/office/drawing/2014/main" id="{A3A0D742-B2AC-079E-5D57-D236EABA8302}"/>
+              </a:ext>
+            </a:extLst>
+          </p:cNvPr>
+          <p:cNvPicPr>
+            <a:picLocks noChangeAspect="1"/>
+          </p:cNvPicPr>
+          <p:nvPr/>
+        </p:nvPicPr>
+        <p:blipFill>
+          <a:blip r:embed="rId2"/>
+          <a:stretch>
+            <a:fillRect/>
+          </a:stretch>
+        </p:blipFill>
+        <p:spPr>
+          <a:xfrm>
+            <a:off x="470630" y="1327872"/>
+            <a:ext cx="2733603" cy="2683580"/>
+          </a:xfrm>
+          <a:prstGeom prst="rect">
+            <a:avLst/>
+          </a:prstGeom>
+        </p:spPr>
+      </p:pic>
       <p:grpSp>
         <p:nvGrpSpPr>
           <p:cNvPr id="36" name="Group 35">
@@ -6392,7 +6422,7 @@
           <p:nvPr/>
         </p:nvPicPr>
         <p:blipFill>
-          <a:blip r:embed="rId2"/>
+          <a:blip r:embed="rId3"/>
           <a:stretch>
             <a:fillRect/>
           </a:stretch>
@@ -6527,36 +6557,6 @@
           </a:p>
         </p:txBody>
       </p:sp>
-      <p:pic>
-        <p:nvPicPr>
-          <p:cNvPr id="3" name="Picture 2">
-            <a:extLst>
-              <a:ext uri="{FF2B5EF4-FFF2-40B4-BE49-F238E27FC236}">
-                <a16:creationId xmlns:a16="http://schemas.microsoft.com/office/drawing/2014/main" id="{7B31C742-68E2-A416-DDCC-B30411A19087}"/>
-              </a:ext>
-            </a:extLst>
-          </p:cNvPr>
-          <p:cNvPicPr>
-            <a:picLocks noChangeAspect="1"/>
-          </p:cNvPicPr>
-          <p:nvPr/>
-        </p:nvPicPr>
-        <p:blipFill>
-          <a:blip r:embed="rId3"/>
-          <a:stretch>
-            <a:fillRect/>
-          </a:stretch>
-        </p:blipFill>
-        <p:spPr>
-          <a:xfrm>
-            <a:off x="220680" y="1260825"/>
-            <a:ext cx="3601747" cy="3013897"/>
-          </a:xfrm>
-          <a:prstGeom prst="rect">
-            <a:avLst/>
-          </a:prstGeom>
-        </p:spPr>
-      </p:pic>
       <p:cxnSp>
         <p:nvCxnSpPr>
           <p:cNvPr id="69" name="Straight Arrow Connector 33"/>
@@ -6567,7 +6567,7 @@
         </p:nvCxnSpPr>
         <p:spPr>
           <a:xfrm flipH="1">
-            <a:off x="998667" y="942597"/>
+            <a:off x="998667" y="989829"/>
             <a:ext cx="2348762" cy="1095675"/>
           </a:xfrm>
           <a:prstGeom prst="straightConnector1">
@@ -6592,8 +6592,8 @@
         </p:nvCxnSpPr>
         <p:spPr>
           <a:xfrm flipH="1">
-            <a:off x="847234" y="776405"/>
-            <a:ext cx="880308" cy="798619"/>
+            <a:off x="883980" y="776405"/>
+            <a:ext cx="843562" cy="761261"/>
           </a:xfrm>
           <a:prstGeom prst="straightConnector1">
             <a:avLst/>
@@ -6693,8 +6693,8 @@
         </p:nvCxnSpPr>
         <p:spPr>
           <a:xfrm flipH="1" flipV="1">
-            <a:off x="1616386" y="2136137"/>
-            <a:ext cx="2296319" cy="29174"/>
+            <a:off x="1591733" y="2054846"/>
+            <a:ext cx="2320972" cy="110465"/>
           </a:xfrm>
           <a:prstGeom prst="straightConnector1">
             <a:avLst/>
@@ -8361,10 +8361,10 @@
       </p:pic>
       <p:pic>
         <p:nvPicPr>
-          <p:cNvPr id="30" name="Picture 29">
+          <p:cNvPr id="4" name="Picture 3">
             <a:extLst>
               <a:ext uri="{FF2B5EF4-FFF2-40B4-BE49-F238E27FC236}">
-                <a16:creationId xmlns:a16="http://schemas.microsoft.com/office/drawing/2014/main" id="{96263B95-E2B2-1346-924A-80944DA96E33}"/>
+                <a16:creationId xmlns:a16="http://schemas.microsoft.com/office/drawing/2014/main" id="{9B909BF4-3107-1F1E-80A5-4DC3D8C95DC4}"/>
               </a:ext>
             </a:extLst>
           </p:cNvPr>
@@ -8381,8 +8381,8 @@
         </p:blipFill>
         <p:spPr>
           <a:xfrm>
-            <a:off x="336497" y="1976910"/>
-            <a:ext cx="5759503" cy="3169465"/>
+            <a:off x="255494" y="1971424"/>
+            <a:ext cx="5809130" cy="3196774"/>
           </a:xfrm>
           <a:prstGeom prst="rect">
             <a:avLst/>
